--- a/docs/AP_II_DevSecOps_Apresentacao.pptx
+++ b/docs/AP_II_DevSecOps_Apresentacao.pptx
@@ -3251,7 +3251,7 @@
                 </a:solidFill>
                 <a:latin typeface="Calibri"/>
               </a:rPr>
-              <a:t>Empresa fictícia: TechSecure Solutions</a:t>
+              <a:t>Cenário proposto no enunciado: empresa fictícia TechSecure Solutions</a:t>
             </a:r>
           </a:p>
         </p:txBody>

--- a/docs/AP_II_DevSecOps_Apresentacao.pptx
+++ b/docs/AP_II_DevSecOps_Apresentacao.pptx
@@ -8446,7 +8446,7 @@
         <p:spPr>
           <a:xfrm>
             <a:off x="502920" y="1828800"/>
-            <a:ext cx="5486400" cy="1980092"/>
+            <a:ext cx="5486400" cy="2120168"/>
           </a:xfrm>
           <a:prstGeom prst="rect">
             <a:avLst/>
@@ -8470,7 +8470,7 @@
         <p:spPr>
           <a:xfrm>
             <a:off x="6263640" y="1828800"/>
-            <a:ext cx="5486400" cy="2399053"/>
+            <a:ext cx="5486400" cy="2566519"/>
           </a:xfrm>
           <a:prstGeom prst="rect">
             <a:avLst/>
@@ -8678,7 +8678,7 @@
         <p:spPr>
           <a:xfrm>
             <a:off x="502920" y="1828800"/>
-            <a:ext cx="5486400" cy="1980092"/>
+            <a:ext cx="5486400" cy="2120168"/>
           </a:xfrm>
           <a:prstGeom prst="rect">
             <a:avLst/>
@@ -8702,7 +8702,7 @@
         <p:spPr>
           <a:xfrm>
             <a:off x="6263640" y="1828800"/>
-            <a:ext cx="5486400" cy="1665871"/>
+            <a:ext cx="5486400" cy="1785405"/>
           </a:xfrm>
           <a:prstGeom prst="rect">
             <a:avLst/>
@@ -8910,7 +8910,7 @@
         <p:spPr>
           <a:xfrm>
             <a:off x="502920" y="1828800"/>
-            <a:ext cx="5486400" cy="1770611"/>
+            <a:ext cx="5486400" cy="1896993"/>
           </a:xfrm>
           <a:prstGeom prst="rect">
             <a:avLst/>
@@ -8934,7 +8934,7 @@
         <p:spPr>
           <a:xfrm>
             <a:off x="6263640" y="1828800"/>
-            <a:ext cx="5486400" cy="1351649"/>
+            <a:ext cx="5486400" cy="1450641"/>
           </a:xfrm>
           <a:prstGeom prst="rect">
             <a:avLst/>
